--- a/assets/pitch-deck/SmartDuka_Pitchdeck_backup.pptx
+++ b/assets/pitch-deck/SmartDuka_Pitchdeck_backup.pptx
@@ -1315,7 +1315,18 @@
                 <a:ea typeface="Montserrat" pitchFamily="34" charset="-122"/>
                 <a:cs typeface="Montserrat" pitchFamily="34" charset="-120"/>
               </a:rPr>
-              <a:t>Empowering Kenya's informal economy from age 6.</a:t>
+              <a:t>AI-Powered, gamified </a:t>
+            </a:r>
+            <a:r>
+              <a:rPr lang="en-US" dirty="0">
+                <a:solidFill>
+                  <a:srgbClr val="94A3B8"/>
+                </a:solidFill>
+                <a:latin typeface="Montserrat" pitchFamily="34" charset="0"/>
+                <a:ea typeface="Montserrat" pitchFamily="34" charset="-122"/>
+                <a:cs typeface="Montserrat" pitchFamily="34" charset="-120"/>
+              </a:rPr>
+              <a:t>numeracy &amp; financial literacy for early learners</a:t>
             </a:r>
             <a:endParaRPr lang="en-US" sz="1800" dirty="0"/>
           </a:p>
@@ -1393,7 +1404,7 @@
                 <a:ea typeface="Montserrat" pitchFamily="34" charset="-122"/>
                 <a:cs typeface="Montserrat" pitchFamily="34" charset="-120"/>
               </a:rPr>
-              <a:t>Martin Mwai</a:t>
+              <a:t>Martin Mwai – Solo Founder</a:t>
             </a:r>
             <a:endParaRPr lang="en-US" sz="1200" dirty="0"/>
           </a:p>
@@ -1505,7 +1516,7 @@
         </p:nvSpPr>
         <p:spPr>
           <a:xfrm>
-            <a:off x="548640" y="502920"/>
+            <a:off x="548640" y="315468"/>
             <a:ext cx="7315200" cy="320040"/>
           </a:xfrm>
           <a:prstGeom prst="rect">
@@ -1544,7 +1555,7 @@
         </p:nvSpPr>
         <p:spPr>
           <a:xfrm>
-            <a:off x="548640" y="868680"/>
+            <a:off x="548640" y="548640"/>
             <a:ext cx="10058400" cy="822960"/>
           </a:xfrm>
           <a:prstGeom prst="rect">
@@ -1626,170 +1637,6 @@
       </p:sp>
       <p:sp>
         <p:nvSpPr>
-          <p:cNvPr id="6" name="Text 4"/>
-          <p:cNvSpPr txBox="1"/>
-          <p:nvPr/>
-        </p:nvSpPr>
-        <p:spPr>
-          <a:xfrm>
-            <a:off x="1184071" y="2360391"/>
-            <a:ext cx="4850969" cy="3171725"/>
-          </a:xfrm>
-          <a:prstGeom prst="rect">
-            <a:avLst/>
-          </a:prstGeom>
-          <a:noFill/>
-          <a:ln/>
-        </p:spPr>
-        <p:txBody>
-          <a:bodyPr wrap="square" lIns="0" tIns="0" rIns="0" bIns="0" rtlCol="0" anchor="t"/>
-          <a:lstStyle/>
-          <a:p>
-            <a:pPr marL="0" indent="0">
-              <a:lnSpc>
-                <a:spcPct val="130000"/>
-              </a:lnSpc>
-              <a:spcAft>
-                <a:spcPts val="1600"/>
-              </a:spcAft>
-              <a:buNone/>
-            </a:pPr>
-            <a:r>
-              <a:rPr lang="en-US" sz="1700" dirty="0">
-                <a:solidFill>
-                  <a:srgbClr val="0F172A"/>
-                </a:solidFill>
-                <a:latin typeface="Montserrat" pitchFamily="34" charset="0"/>
-                <a:ea typeface="Montserrat" pitchFamily="34" charset="-122"/>
-                <a:cs typeface="Montserrat" pitchFamily="34" charset="-120"/>
-              </a:rPr>
-              <a:t>Based on a true story. On my brother's first day at a new school, a teacher asked where our parent was.</a:t>
-            </a:r>
-            <a:endParaRPr lang="en-US" sz="1700" dirty="0"/>
-          </a:p>
-          <a:p>
-            <a:pPr marL="0" indent="0">
-              <a:lnSpc>
-                <a:spcPct val="130000"/>
-              </a:lnSpc>
-              <a:spcAft>
-                <a:spcPts val="1600"/>
-              </a:spcAft>
-              <a:buNone/>
-            </a:pPr>
-            <a:r>
-              <a:rPr lang="en-US" sz="1700" dirty="0">
-                <a:solidFill>
-                  <a:srgbClr val="0F172A"/>
-                </a:solidFill>
-                <a:latin typeface="Montserrat" pitchFamily="34" charset="0"/>
-                <a:ea typeface="Montserrat" pitchFamily="34" charset="-122"/>
-                <a:cs typeface="Montserrat" pitchFamily="34" charset="-120"/>
-              </a:rPr>
-              <a:t>He answered in Kamba, our mother tongue, instead of Swahili. </a:t>
-            </a:r>
-            <a:endParaRPr lang="en-US" sz="1700" dirty="0"/>
-          </a:p>
-          <a:p>
-            <a:pPr marL="0" indent="0">
-              <a:lnSpc>
-                <a:spcPct val="130000"/>
-              </a:lnSpc>
-              <a:spcAft>
-                <a:spcPts val="400"/>
-              </a:spcAft>
-              <a:buNone/>
-            </a:pPr>
-            <a:r>
-              <a:rPr lang="en-US" sz="1600" dirty="0">
-                <a:solidFill>
-                  <a:srgbClr val="64748B"/>
-                </a:solidFill>
-                <a:effectLst>
-                  <a:reflection endPos="0" dir="5400000" sy="-100000" algn="bl" rotWithShape="0"/>
-                </a:effectLst>
-                <a:latin typeface="Montserrat" pitchFamily="34" charset="0"/>
-                <a:ea typeface="Montserrat" pitchFamily="34" charset="-122"/>
-                <a:cs typeface="Montserrat" pitchFamily="34" charset="-120"/>
-              </a:rPr>
-              <a:t>Nobody around us even noticed that was a gap.</a:t>
-            </a:r>
-            <a:endParaRPr lang="en-US" sz="1600" dirty="0">
-              <a:effectLst>
-                <a:reflection endPos="0" dir="5400000" sy="-100000" algn="bl" rotWithShape="0"/>
-              </a:effectLst>
-            </a:endParaRPr>
-          </a:p>
-          <a:p>
-            <a:pPr marL="0" indent="0">
-              <a:lnSpc>
-                <a:spcPct val="130000"/>
-              </a:lnSpc>
-              <a:buNone/>
-            </a:pPr>
-            <a:r>
-              <a:rPr lang="en-US" sz="1600" dirty="0">
-                <a:solidFill>
-                  <a:srgbClr val="64748B"/>
-                </a:solidFill>
-                <a:effectLst>
-                  <a:reflection endPos="0" dir="5400000" sy="-100000" algn="bl" rotWithShape="0"/>
-                </a:effectLst>
-                <a:latin typeface="Montserrat" pitchFamily="34" charset="0"/>
-                <a:ea typeface="Montserrat" pitchFamily="34" charset="-122"/>
-                <a:cs typeface="Montserrat" pitchFamily="34" charset="-120"/>
-              </a:rPr>
-              <a:t>It was just normal.</a:t>
-            </a:r>
-            <a:endParaRPr lang="en-US" sz="1600" dirty="0">
-              <a:effectLst>
-                <a:reflection endPos="0" dir="5400000" sy="-100000" algn="bl" rotWithShape="0"/>
-              </a:effectLst>
-            </a:endParaRPr>
-          </a:p>
-        </p:txBody>
-      </p:sp>
-      <p:sp>
-        <p:nvSpPr>
-          <p:cNvPr id="7" name="Text 5"/>
-          <p:cNvSpPr txBox="1"/>
-          <p:nvPr/>
-        </p:nvSpPr>
-        <p:spPr>
-          <a:xfrm>
-            <a:off x="6766560" y="1965960"/>
-            <a:ext cx="2011680" cy="640080"/>
-          </a:xfrm>
-          <a:prstGeom prst="rect">
-            <a:avLst/>
-          </a:prstGeom>
-          <a:noFill/>
-          <a:ln/>
-        </p:spPr>
-        <p:txBody>
-          <a:bodyPr wrap="square" lIns="0" tIns="0" rIns="0" bIns="0" rtlCol="0" anchor="ctr"/>
-          <a:lstStyle/>
-          <a:p>
-            <a:pPr marL="0" indent="0">
-              <a:buNone/>
-            </a:pPr>
-            <a:r>
-              <a:rPr lang="en-US" sz="3600" b="1" dirty="0">
-                <a:solidFill>
-                  <a:srgbClr val="16A34A"/>
-                </a:solidFill>
-                <a:latin typeface="Montserrat" pitchFamily="34" charset="0"/>
-                <a:ea typeface="Montserrat" pitchFamily="34" charset="-122"/>
-                <a:cs typeface="Montserrat" pitchFamily="34" charset="-120"/>
-              </a:rPr>
-              <a:t>1 in 3</a:t>
-            </a:r>
-            <a:endParaRPr lang="en-US" sz="3600" dirty="0"/>
-          </a:p>
-        </p:txBody>
-      </p:sp>
-      <p:sp>
-        <p:nvSpPr>
           <p:cNvPr id="8" name="Text 6"/>
           <p:cNvSpPr txBox="1"/>
           <p:nvPr/>
@@ -1815,17 +1662,6 @@
               </a:lnSpc>
               <a:buNone/>
             </a:pPr>
-            <a:r>
-              <a:rPr lang="en-US" sz="1200" dirty="0">
-                <a:solidFill>
-                  <a:srgbClr val="64748B"/>
-                </a:solidFill>
-                <a:latin typeface="Montserrat" pitchFamily="34" charset="0"/>
-                <a:ea typeface="Montserrat" pitchFamily="34" charset="-122"/>
-                <a:cs typeface="Montserrat" pitchFamily="34" charset="-120"/>
-              </a:rPr>
-              <a:t>primary school children in East Africa can do basic arithmetic by Grade 3</a:t>
-            </a:r>
             <a:endParaRPr lang="en-US" sz="1200" dirty="0"/>
           </a:p>
         </p:txBody>
@@ -1838,7 +1674,7 @@
         </p:nvSpPr>
         <p:spPr>
           <a:xfrm>
-            <a:off x="6766560" y="3200400"/>
+            <a:off x="6793992" y="3287486"/>
             <a:ext cx="4800600" cy="0"/>
           </a:xfrm>
           <a:prstGeom prst="line">
@@ -1855,94 +1691,13 @@
       </p:sp>
       <p:sp>
         <p:nvSpPr>
-          <p:cNvPr id="10" name="Text 8"/>
-          <p:cNvSpPr txBox="1"/>
-          <p:nvPr/>
-        </p:nvSpPr>
-        <p:spPr>
-          <a:xfrm>
-            <a:off x="6766560" y="3429000"/>
-            <a:ext cx="2011680" cy="640080"/>
-          </a:xfrm>
-          <a:prstGeom prst="rect">
-            <a:avLst/>
-          </a:prstGeom>
-          <a:noFill/>
-          <a:ln/>
-        </p:spPr>
-        <p:txBody>
-          <a:bodyPr wrap="square" lIns="0" tIns="0" rIns="0" bIns="0" rtlCol="0" anchor="ctr"/>
-          <a:lstStyle/>
-          <a:p>
-            <a:pPr marL="0" indent="0">
-              <a:buNone/>
-            </a:pPr>
-            <a:r>
-              <a:rPr lang="en-US" sz="3600" b="1" dirty="0">
-                <a:solidFill>
-                  <a:srgbClr val="16A34A"/>
-                </a:solidFill>
-                <a:latin typeface="Montserrat" pitchFamily="34" charset="0"/>
-                <a:ea typeface="Montserrat" pitchFamily="34" charset="-122"/>
-                <a:cs typeface="Montserrat" pitchFamily="34" charset="-120"/>
-              </a:rPr>
-              <a:t>84%</a:t>
-            </a:r>
-            <a:endParaRPr lang="en-US" sz="3600" dirty="0"/>
-          </a:p>
-        </p:txBody>
-      </p:sp>
-      <p:sp>
-        <p:nvSpPr>
-          <p:cNvPr id="11" name="Text 9"/>
-          <p:cNvSpPr txBox="1"/>
-          <p:nvPr/>
-        </p:nvSpPr>
-        <p:spPr>
-          <a:xfrm>
-            <a:off x="8732520" y="3410712"/>
-            <a:ext cx="3063240" cy="1005840"/>
-          </a:xfrm>
-          <a:prstGeom prst="rect">
-            <a:avLst/>
-          </a:prstGeom>
-          <a:noFill/>
-          <a:ln/>
-        </p:spPr>
-        <p:txBody>
-          <a:bodyPr wrap="square" lIns="0" tIns="0" rIns="0" bIns="0" rtlCol="0" anchor="t"/>
-          <a:lstStyle/>
-          <a:p>
-            <a:pPr marL="0" indent="0">
-              <a:lnSpc>
-                <a:spcPct val="120000"/>
-              </a:lnSpc>
-              <a:buNone/>
-            </a:pPr>
-            <a:r>
-              <a:rPr lang="en-US" sz="1200" dirty="0">
-                <a:solidFill>
-                  <a:srgbClr val="64748B"/>
-                </a:solidFill>
-                <a:latin typeface="Montserrat" pitchFamily="34" charset="0"/>
-                <a:ea typeface="Montserrat" pitchFamily="34" charset="-122"/>
-                <a:cs typeface="Montserrat" pitchFamily="34" charset="-120"/>
-              </a:rPr>
-              <a:t>of Kenya's workforce works in the informal economy, where these skills are used every day</a:t>
-            </a:r>
-            <a:endParaRPr lang="en-US" sz="1200" dirty="0"/>
-          </a:p>
-        </p:txBody>
-      </p:sp>
-      <p:sp>
-        <p:nvSpPr>
           <p:cNvPr id="12" name="Shape 10"/>
           <p:cNvSpPr/>
           <p:nvPr/>
         </p:nvSpPr>
         <p:spPr>
           <a:xfrm>
-            <a:off x="6766560" y="4663440"/>
+            <a:off x="6793992" y="4823098"/>
             <a:ext cx="4800600" cy="0"/>
           </a:xfrm>
           <a:prstGeom prst="line">
@@ -1956,85 +1711,11 @@
             <a:prstDash val="solid"/>
           </a:ln>
         </p:spPr>
-      </p:sp>
-      <p:sp>
-        <p:nvSpPr>
-          <p:cNvPr id="13" name="Text 11"/>
-          <p:cNvSpPr txBox="1"/>
-          <p:nvPr/>
-        </p:nvSpPr>
-        <p:spPr>
-          <a:xfrm>
-            <a:off x="6766560" y="4892040"/>
-            <a:ext cx="2011680" cy="640080"/>
-          </a:xfrm>
-          <a:prstGeom prst="rect">
-            <a:avLst/>
-          </a:prstGeom>
-          <a:noFill/>
-          <a:ln/>
-        </p:spPr>
-        <p:txBody>
-          <a:bodyPr wrap="square" lIns="0" tIns="0" rIns="0" bIns="0" rtlCol="0" anchor="ctr"/>
-          <a:lstStyle/>
-          <a:p>
-            <a:pPr marL="0" indent="0">
-              <a:buNone/>
-            </a:pPr>
-            <a:r>
-              <a:rPr lang="en-US" sz="3600" b="1" dirty="0">
-                <a:solidFill>
-                  <a:srgbClr val="16A34A"/>
-                </a:solidFill>
-                <a:latin typeface="Montserrat" pitchFamily="34" charset="0"/>
-                <a:ea typeface="Montserrat" pitchFamily="34" charset="-122"/>
-                <a:cs typeface="Montserrat" pitchFamily="34" charset="-120"/>
-              </a:rPr>
-              <a:t>21.7%</a:t>
-            </a:r>
-            <a:endParaRPr lang="en-US" sz="3600" dirty="0"/>
-          </a:p>
-        </p:txBody>
-      </p:sp>
-      <p:sp>
-        <p:nvSpPr>
-          <p:cNvPr id="14" name="Text 12"/>
-          <p:cNvSpPr txBox="1"/>
-          <p:nvPr/>
-        </p:nvSpPr>
-        <p:spPr>
-          <a:xfrm>
-            <a:off x="8732520" y="4873752"/>
-            <a:ext cx="3063240" cy="1005840"/>
-          </a:xfrm>
-          <a:prstGeom prst="rect">
-            <a:avLst/>
-          </a:prstGeom>
-          <a:noFill/>
-          <a:ln/>
-        </p:spPr>
-        <p:txBody>
-          <a:bodyPr wrap="square" lIns="0" tIns="0" rIns="0" bIns="0" rtlCol="0" anchor="t"/>
-          <a:lstStyle/>
-          <a:p>
-            <a:pPr marL="0" indent="0">
-              <a:lnSpc>
-                <a:spcPct val="120000"/>
-              </a:lnSpc>
-              <a:buNone/>
-            </a:pPr>
-            <a:r>
-              <a:rPr lang="en-US" sz="1200" dirty="0">
-                <a:solidFill>
-                  <a:srgbClr val="64748B"/>
-                </a:solidFill>
-                <a:latin typeface="Montserrat" pitchFamily="34" charset="0"/>
-                <a:ea typeface="Montserrat" pitchFamily="34" charset="-122"/>
-                <a:cs typeface="Montserrat" pitchFamily="34" charset="-120"/>
-              </a:rPr>
-              <a:t>of rural Kenyans have used the internet, most EdTech assumes they have</a:t>
-            </a:r>
-            <a:endParaRPr lang="en-US" sz="1200" dirty="0"/>
+        <p:txBody>
+          <a:bodyPr/>
+          <a:lstStyle/>
+          <a:p>
+            <a:endParaRPr lang="en-KE" dirty="0"/>
           </a:p>
         </p:txBody>
       </p:sp>
@@ -2074,6 +1755,370 @@
               <a:t>02</a:t>
             </a:r>
             <a:endParaRPr lang="en-US" sz="1000" dirty="0"/>
+          </a:p>
+        </p:txBody>
+      </p:sp>
+      <p:sp>
+        <p:nvSpPr>
+          <p:cNvPr id="17" name="TextBox 16">
+            <a:extLst>
+              <a:ext uri="{FF2B5EF4-FFF2-40B4-BE49-F238E27FC236}">
+                <a16:creationId xmlns:a16="http://schemas.microsoft.com/office/drawing/2014/main" id="{2D1AB216-E3A7-3D22-8002-67CC96180CE6}"/>
+              </a:ext>
+            </a:extLst>
+          </p:cNvPr>
+          <p:cNvSpPr txBox="1"/>
+          <p:nvPr/>
+        </p:nvSpPr>
+        <p:spPr>
+          <a:xfrm>
+            <a:off x="433977" y="1293257"/>
+            <a:ext cx="9601200" cy="411480"/>
+          </a:xfrm>
+          <a:prstGeom prst="rect">
+            <a:avLst/>
+          </a:prstGeom>
+          <a:noFill/>
+        </p:spPr>
+        <p:txBody>
+          <a:bodyPr wrap="square">
+            <a:spAutoFit/>
+          </a:bodyPr>
+          <a:lstStyle/>
+          <a:p>
+            <a:pPr>
+              <a:defRPr sz="1200">
+                <a:solidFill>
+                  <a:srgbClr val="64748B"/>
+                </a:solidFill>
+                <a:latin typeface="Segoe UI"/>
+              </a:defRPr>
+            </a:pPr>
+            <a:r>
+              <a:rPr dirty="0"/>
+              <a:t>Foundational literacy and applied numeracy gaps compound quietly into permanent economic exclusion.</a:t>
+            </a:r>
+          </a:p>
+        </p:txBody>
+      </p:sp>
+      <p:sp>
+        <p:nvSpPr>
+          <p:cNvPr id="19" name="TextBox 18">
+            <a:extLst>
+              <a:ext uri="{FF2B5EF4-FFF2-40B4-BE49-F238E27FC236}">
+                <a16:creationId xmlns:a16="http://schemas.microsoft.com/office/drawing/2014/main" id="{BABD5708-A066-EA79-189F-FAE2B1ECE816}"/>
+              </a:ext>
+            </a:extLst>
+          </p:cNvPr>
+          <p:cNvSpPr txBox="1"/>
+          <p:nvPr/>
+        </p:nvSpPr>
+        <p:spPr>
+          <a:xfrm>
+            <a:off x="1188720" y="2209978"/>
+            <a:ext cx="4389120" cy="3354765"/>
+          </a:xfrm>
+          <a:prstGeom prst="rect">
+            <a:avLst/>
+          </a:prstGeom>
+          <a:noFill/>
+        </p:spPr>
+        <p:txBody>
+          <a:bodyPr wrap="square">
+            <a:spAutoFit/>
+          </a:bodyPr>
+          <a:lstStyle/>
+          <a:p>
+            <a:pPr>
+              <a:defRPr sz="1000" b="1">
+                <a:solidFill>
+                  <a:srgbClr val="059669"/>
+                </a:solidFill>
+                <a:latin typeface="Montserrat"/>
+              </a:defRPr>
+            </a:pPr>
+            <a:r>
+              <a:rPr lang="en-US" sz="1400" dirty="0"/>
+              <a:t>Based on a</a:t>
+            </a:r>
+            <a:r>
+              <a:rPr sz="1400" dirty="0"/>
+              <a:t> TRUE STORY</a:t>
+            </a:r>
+          </a:p>
+          <a:p>
+            <a:pPr>
+              <a:spcBef>
+                <a:spcPts val="1000"/>
+              </a:spcBef>
+              <a:defRPr sz="1400" i="1">
+                <a:solidFill>
+                  <a:srgbClr val="0F172A"/>
+                </a:solidFill>
+                <a:latin typeface="Montserrat"/>
+              </a:defRPr>
+            </a:pPr>
+            <a:r>
+              <a:rPr sz="1400" dirty="0"/>
+              <a:t>“On my brother’s first day at a new school, the teacher asked where our parents were. He answered in Kamba instead of Swahili.</a:t>
+            </a:r>
+            <a:br>
+              <a:rPr sz="1400" dirty="0"/>
+            </a:br>
+            <a:br>
+              <a:rPr sz="1400" dirty="0"/>
+            </a:br>
+            <a:r>
+              <a:rPr sz="1400" dirty="0"/>
+              <a:t>In Kenya, language and conceptual gaps don't announce themselves — they become normal.”</a:t>
+            </a:r>
+          </a:p>
+          <a:p>
+            <a:pPr>
+              <a:spcBef>
+                <a:spcPts val="1200"/>
+              </a:spcBef>
+              <a:defRPr sz="1100" b="1">
+                <a:solidFill>
+                  <a:srgbClr val="64748B"/>
+                </a:solidFill>
+                <a:latin typeface="Segoe UI"/>
+              </a:defRPr>
+            </a:pPr>
+            <a:r>
+              <a:rPr sz="1400" dirty="0"/>
+              <a:t>— Martin Mwai, Founder &amp; Lead Architect</a:t>
+            </a:r>
+          </a:p>
+          <a:p>
+            <a:pPr>
+              <a:spcBef>
+                <a:spcPts val="1400"/>
+              </a:spcBef>
+              <a:defRPr sz="1100">
+                <a:solidFill>
+                  <a:srgbClr val="475569"/>
+                </a:solidFill>
+                <a:latin typeface="Segoe UI"/>
+              </a:defRPr>
+            </a:pPr>
+            <a:r>
+              <a:rPr sz="1400" dirty="0"/>
+              <a:t>Abstract Western EdTech drills ignore this reality. Children fail not from lack of intelligence, but because existing tools assume high-bandwidth connectivity and foreign idioms.</a:t>
+            </a:r>
+          </a:p>
+        </p:txBody>
+      </p:sp>
+      <p:sp>
+        <p:nvSpPr>
+          <p:cNvPr id="21" name="TextBox 20">
+            <a:extLst>
+              <a:ext uri="{FF2B5EF4-FFF2-40B4-BE49-F238E27FC236}">
+                <a16:creationId xmlns:a16="http://schemas.microsoft.com/office/drawing/2014/main" id="{19758FF1-DDDB-A6BC-18FD-B47768A63164}"/>
+              </a:ext>
+            </a:extLst>
+          </p:cNvPr>
+          <p:cNvSpPr txBox="1"/>
+          <p:nvPr/>
+        </p:nvSpPr>
+        <p:spPr>
+          <a:xfrm>
+            <a:off x="6798346" y="1749538"/>
+            <a:ext cx="4663440" cy="1323439"/>
+          </a:xfrm>
+          <a:prstGeom prst="rect">
+            <a:avLst/>
+          </a:prstGeom>
+          <a:noFill/>
+        </p:spPr>
+        <p:txBody>
+          <a:bodyPr wrap="square">
+            <a:spAutoFit/>
+          </a:bodyPr>
+          <a:lstStyle/>
+          <a:p>
+            <a:pPr>
+              <a:defRPr sz="2400" b="1">
+                <a:solidFill>
+                  <a:srgbClr val="EF4444"/>
+                </a:solidFill>
+                <a:latin typeface="Montserrat"/>
+              </a:defRPr>
+            </a:pPr>
+            <a:r>
+              <a:rPr dirty="0"/>
+              <a:t>1 in 3</a:t>
+            </a:r>
+          </a:p>
+          <a:p>
+            <a:pPr>
+              <a:defRPr sz="1150" b="1">
+                <a:solidFill>
+                  <a:srgbClr val="0F172A"/>
+                </a:solidFill>
+                <a:latin typeface="Montserrat"/>
+              </a:defRPr>
+            </a:pPr>
+            <a:r>
+              <a:rPr sz="1400" dirty="0"/>
+              <a:t>Primary learners in East Africa achieve basic arithmetic by Grade 3</a:t>
+            </a:r>
+          </a:p>
+          <a:p>
+            <a:pPr>
+              <a:defRPr sz="950">
+                <a:solidFill>
+                  <a:srgbClr val="64748B"/>
+                </a:solidFill>
+                <a:latin typeface="Segoe UI"/>
+              </a:defRPr>
+            </a:pPr>
+            <a:r>
+              <a:rPr sz="1400" dirty="0"/>
+              <a:t>Over 90% of children in Sub-Saharan Africa cannot read or perform basic arithmetic by age 10.</a:t>
+            </a:r>
+          </a:p>
+        </p:txBody>
+      </p:sp>
+      <p:sp>
+        <p:nvSpPr>
+          <p:cNvPr id="23" name="TextBox 22">
+            <a:extLst>
+              <a:ext uri="{FF2B5EF4-FFF2-40B4-BE49-F238E27FC236}">
+                <a16:creationId xmlns:a16="http://schemas.microsoft.com/office/drawing/2014/main" id="{CE555572-D388-ED8C-D3CD-004AFD85613F}"/>
+              </a:ext>
+            </a:extLst>
+          </p:cNvPr>
+          <p:cNvSpPr txBox="1"/>
+          <p:nvPr/>
+        </p:nvSpPr>
+        <p:spPr>
+          <a:xfrm>
+            <a:off x="6793992" y="3348097"/>
+            <a:ext cx="4663440" cy="1323439"/>
+          </a:xfrm>
+          <a:prstGeom prst="rect">
+            <a:avLst/>
+          </a:prstGeom>
+          <a:noFill/>
+        </p:spPr>
+        <p:txBody>
+          <a:bodyPr wrap="square">
+            <a:spAutoFit/>
+          </a:bodyPr>
+          <a:lstStyle/>
+          <a:p>
+            <a:pPr>
+              <a:defRPr sz="2400" b="1">
+                <a:solidFill>
+                  <a:srgbClr val="F59E0B"/>
+                </a:solidFill>
+                <a:latin typeface="Montserrat"/>
+              </a:defRPr>
+            </a:pPr>
+            <a:r>
+              <a:rPr dirty="0"/>
+              <a:t>84%</a:t>
+            </a:r>
+          </a:p>
+          <a:p>
+            <a:pPr>
+              <a:defRPr sz="1150" b="1">
+                <a:solidFill>
+                  <a:srgbClr val="0F172A"/>
+                </a:solidFill>
+                <a:latin typeface="Montserrat"/>
+              </a:defRPr>
+            </a:pPr>
+            <a:r>
+              <a:rPr sz="1400" dirty="0"/>
+              <a:t>Of Kenya's workforce operates within the informal economy</a:t>
+            </a:r>
+          </a:p>
+          <a:p>
+            <a:pPr>
+              <a:defRPr sz="950">
+                <a:solidFill>
+                  <a:srgbClr val="64748B"/>
+                </a:solidFill>
+                <a:latin typeface="Segoe UI"/>
+              </a:defRPr>
+            </a:pPr>
+            <a:r>
+              <a:rPr sz="1400" dirty="0"/>
+              <a:t>Applied mental math, trade negotiation, and trust are fundamental daily survival skills.</a:t>
+            </a:r>
+          </a:p>
+        </p:txBody>
+      </p:sp>
+      <p:sp>
+        <p:nvSpPr>
+          <p:cNvPr id="26" name="TextBox 25">
+            <a:extLst>
+              <a:ext uri="{FF2B5EF4-FFF2-40B4-BE49-F238E27FC236}">
+                <a16:creationId xmlns:a16="http://schemas.microsoft.com/office/drawing/2014/main" id="{7BF237B1-0108-89B0-2B5B-DAB34B98310E}"/>
+              </a:ext>
+            </a:extLst>
+          </p:cNvPr>
+          <p:cNvSpPr txBox="1"/>
+          <p:nvPr/>
+        </p:nvSpPr>
+        <p:spPr>
+          <a:xfrm>
+            <a:off x="6798346" y="4903023"/>
+            <a:ext cx="4663440" cy="1323439"/>
+          </a:xfrm>
+          <a:prstGeom prst="rect">
+            <a:avLst/>
+          </a:prstGeom>
+          <a:noFill/>
+        </p:spPr>
+        <p:txBody>
+          <a:bodyPr wrap="square">
+            <a:spAutoFit/>
+          </a:bodyPr>
+          <a:lstStyle/>
+          <a:p>
+            <a:pPr>
+              <a:defRPr sz="2400" b="1">
+                <a:solidFill>
+                  <a:srgbClr val="0081FB"/>
+                </a:solidFill>
+                <a:latin typeface="Montserrat"/>
+              </a:defRPr>
+            </a:pPr>
+            <a:r>
+              <a:rPr dirty="0"/>
+              <a:t>78.3% Offline</a:t>
+            </a:r>
+          </a:p>
+          <a:p>
+            <a:pPr>
+              <a:defRPr sz="1150" b="1">
+                <a:solidFill>
+                  <a:srgbClr val="0F172A"/>
+                </a:solidFill>
+                <a:latin typeface="Montserrat"/>
+              </a:defRPr>
+            </a:pPr>
+            <a:r>
+              <a:rPr sz="1400" dirty="0"/>
+              <a:t>With only 21.7% rural internet penetration, cloud EdTech fails</a:t>
+            </a:r>
+          </a:p>
+          <a:p>
+            <a:pPr>
+              <a:defRPr sz="950">
+                <a:solidFill>
+                  <a:srgbClr val="64748B"/>
+                </a:solidFill>
+                <a:latin typeface="Segoe UI"/>
+              </a:defRPr>
+            </a:pPr>
+            <a:r>
+              <a:rPr sz="1400" dirty="0"/>
+              <a:t>Mainstream solutions require high-speed continuous data, locking out millions of rural students.</a:t>
+            </a:r>
           </a:p>
         </p:txBody>
       </p:sp>
@@ -2143,7 +2188,7 @@
                 <a:ea typeface="Montserrat" pitchFamily="34" charset="-122"/>
                 <a:cs typeface="Montserrat" pitchFamily="34" charset="-120"/>
               </a:rPr>
-              <a:t>THE DUKA LOOP</a:t>
+              <a:t>THE CORE PRODUCT MECHANIC</a:t>
             </a:r>
             <a:endParaRPr lang="en-US" sz="1200" dirty="0"/>
           </a:p>
@@ -2196,8 +2241,8 @@
         </p:nvSpPr>
         <p:spPr>
           <a:xfrm>
-            <a:off x="548640" y="1691640"/>
-            <a:ext cx="9601200" cy="548640"/>
+            <a:off x="548640" y="1668780"/>
+            <a:ext cx="10881360" cy="595449"/>
           </a:xfrm>
           <a:prstGeom prst="rect">
             <a:avLst/>
@@ -2221,7 +2266,7 @@
                 <a:ea typeface="Montserrat" pitchFamily="34" charset="-122"/>
                 <a:cs typeface="Montserrat" pitchFamily="34" charset="-120"/>
               </a:rPr>
-              <a:t>A duka — a small corner shop — is the most familiar commercial space in East Africa. SmartDuka turns it into a full learning engine.</a:t>
+              <a:t>A Duka (corner shop) is the most familiar commercial space in East Africa. SmartDuka turns it into an adaptive, gamified learning loop.</a:t>
             </a:r>
             <a:endParaRPr lang="en-US" sz="1400" dirty="0"/>
           </a:p>
@@ -2235,8 +2280,8 @@
         </p:nvSpPr>
         <p:spPr>
           <a:xfrm>
-            <a:off x="548640" y="2423160"/>
-            <a:ext cx="3520440" cy="3566160"/>
+            <a:off x="548640" y="2423159"/>
+            <a:ext cx="3520440" cy="3977641"/>
           </a:xfrm>
           <a:prstGeom prst="roundRect">
             <a:avLst>
@@ -2323,7 +2368,7 @@
         </p:nvSpPr>
         <p:spPr>
           <a:xfrm>
-            <a:off x="868680" y="3474720"/>
+            <a:off x="1691640" y="2766060"/>
             <a:ext cx="2880360" cy="457200"/>
           </a:xfrm>
           <a:prstGeom prst="rect">
@@ -2362,8 +2407,8 @@
         </p:nvSpPr>
         <p:spPr>
           <a:xfrm>
-            <a:off x="868680" y="3931920"/>
-            <a:ext cx="2880360" cy="914400"/>
+            <a:off x="868680" y="3931919"/>
+            <a:ext cx="2880360" cy="1655757"/>
           </a:xfrm>
           <a:prstGeom prst="rect">
             <a:avLst/>
@@ -2375,11 +2420,10 @@
           <a:bodyPr wrap="square" lIns="0" tIns="0" rIns="0" bIns="0" rtlCol="0" anchor="t"/>
           <a:lstStyle/>
           <a:p>
-            <a:pPr marL="0" indent="0">
+            <a:pPr>
               <a:lnSpc>
                 <a:spcPct val="125000"/>
               </a:lnSpc>
-              <a:buNone/>
             </a:pPr>
             <a:r>
               <a:rPr lang="en-US" sz="1250" dirty="0">
@@ -2392,6 +2436,44 @@
               </a:rPr>
               <a:t>AI-generated Kenyan customers with real shopping lists, in Swahili and English</a:t>
             </a:r>
+          </a:p>
+          <a:p>
+            <a:pPr>
+              <a:lnSpc>
+                <a:spcPct val="125000"/>
+              </a:lnSpc>
+            </a:pPr>
+            <a:br>
+              <a:rPr lang="en-US" sz="1250" dirty="0">
+                <a:solidFill>
+                  <a:srgbClr val="64748B"/>
+                </a:solidFill>
+                <a:latin typeface="Montserrat" pitchFamily="34" charset="0"/>
+                <a:ea typeface="Montserrat" pitchFamily="34" charset="-122"/>
+                <a:cs typeface="Montserrat" pitchFamily="34" charset="-120"/>
+              </a:rPr>
+            </a:br>
+            <a:r>
+              <a:rPr lang="en-US" sz="1250" dirty="0">
+                <a:solidFill>
+                  <a:srgbClr val="64748B"/>
+                </a:solidFill>
+                <a:latin typeface="Montserrat" pitchFamily="34" charset="0"/>
+                <a:ea typeface="Montserrat" pitchFamily="34" charset="-122"/>
+                <a:cs typeface="Montserrat" pitchFamily="34" charset="-120"/>
+              </a:rPr>
+              <a:t>Dynamic stock negotiation: Customers adapt when goods run low.</a:t>
+            </a:r>
+            <a:br>
+              <a:rPr lang="en-US" sz="1250" dirty="0">
+                <a:solidFill>
+                  <a:srgbClr val="64748B"/>
+                </a:solidFill>
+                <a:latin typeface="Montserrat" pitchFamily="34" charset="0"/>
+                <a:ea typeface="Montserrat" pitchFamily="34" charset="-122"/>
+                <a:cs typeface="Montserrat" pitchFamily="34" charset="-120"/>
+              </a:rPr>
+            </a:br>
             <a:endParaRPr lang="en-US" sz="1250" dirty="0"/>
           </a:p>
         </p:txBody>
@@ -2404,7 +2486,7 @@
         </p:nvSpPr>
         <p:spPr>
           <a:xfrm>
-            <a:off x="868680" y="4983480"/>
+            <a:off x="761999" y="5680166"/>
             <a:ext cx="2880360" cy="0"/>
           </a:xfrm>
           <a:prstGeom prst="line">
@@ -2427,8 +2509,8 @@
         </p:nvSpPr>
         <p:spPr>
           <a:xfrm>
-            <a:off x="868680" y="5120640"/>
-            <a:ext cx="2880360" cy="777240"/>
+            <a:off x="761999" y="5748784"/>
+            <a:ext cx="2880360" cy="559526"/>
           </a:xfrm>
           <a:prstGeom prst="rect">
             <a:avLst/>
@@ -2470,7 +2552,7 @@
         <p:spPr>
           <a:xfrm>
             <a:off x="4389120" y="2423160"/>
-            <a:ext cx="3520440" cy="3566160"/>
+            <a:ext cx="3520440" cy="3977640"/>
           </a:xfrm>
           <a:prstGeom prst="roundRect">
             <a:avLst>
@@ -2557,8 +2639,8 @@
         </p:nvSpPr>
         <p:spPr>
           <a:xfrm>
-            <a:off x="4709160" y="3474720"/>
-            <a:ext cx="2880360" cy="457200"/>
+            <a:off x="5509260" y="2788920"/>
+            <a:ext cx="2080260" cy="457200"/>
           </a:xfrm>
           <a:prstGeom prst="rect">
             <a:avLst/>
@@ -2596,8 +2678,8 @@
         </p:nvSpPr>
         <p:spPr>
           <a:xfrm>
-            <a:off x="4709160" y="3931920"/>
-            <a:ext cx="2880360" cy="914400"/>
+            <a:off x="4709160" y="3930468"/>
+            <a:ext cx="2880360" cy="1542067"/>
           </a:xfrm>
           <a:prstGeom prst="rect">
             <a:avLst/>
@@ -2626,6 +2708,37 @@
               </a:rPr>
               <a:t>Real KES transactions build numeracy the child never sees as a lesson</a:t>
             </a:r>
+          </a:p>
+          <a:p>
+            <a:pPr marL="0" indent="0">
+              <a:lnSpc>
+                <a:spcPct val="125000"/>
+              </a:lnSpc>
+              <a:buNone/>
+            </a:pPr>
+            <a:endParaRPr lang="en-US" sz="1250" dirty="0">
+              <a:solidFill>
+                <a:srgbClr val="64748B"/>
+              </a:solidFill>
+              <a:latin typeface="Montserrat" pitchFamily="34" charset="0"/>
+            </a:endParaRPr>
+          </a:p>
+          <a:p>
+            <a:pPr marL="0" indent="0">
+              <a:lnSpc>
+                <a:spcPct val="125000"/>
+              </a:lnSpc>
+              <a:buNone/>
+            </a:pPr>
+            <a:r>
+              <a:rPr lang="en-US" sz="1250" dirty="0">
+                <a:solidFill>
+                  <a:srgbClr val="64748B"/>
+                </a:solidFill>
+                <a:latin typeface="Montserrat" pitchFamily="34" charset="0"/>
+              </a:rPr>
+              <a:t>Fast mental math under natural shop pressure without timed panic</a:t>
+            </a:r>
             <a:endParaRPr lang="en-US" sz="1250" dirty="0"/>
           </a:p>
         </p:txBody>
@@ -2638,7 +2751,7 @@
         </p:nvSpPr>
         <p:spPr>
           <a:xfrm>
-            <a:off x="4709160" y="4983480"/>
+            <a:off x="4709160" y="5685246"/>
             <a:ext cx="2880360" cy="0"/>
           </a:xfrm>
           <a:prstGeom prst="line">
@@ -2661,8 +2774,8 @@
         </p:nvSpPr>
         <p:spPr>
           <a:xfrm>
-            <a:off x="4709160" y="5120640"/>
-            <a:ext cx="2880360" cy="777240"/>
+            <a:off x="4709160" y="5748784"/>
+            <a:ext cx="2880360" cy="559526"/>
           </a:xfrm>
           <a:prstGeom prst="rect">
             <a:avLst/>
@@ -2704,7 +2817,7 @@
         <p:spPr>
           <a:xfrm>
             <a:off x="8229600" y="2423160"/>
-            <a:ext cx="3520440" cy="3566160"/>
+            <a:ext cx="3520440" cy="3977640"/>
           </a:xfrm>
           <a:prstGeom prst="roundRect">
             <a:avLst>
@@ -2721,6 +2834,13 @@
             <a:prstDash val="solid"/>
           </a:ln>
         </p:spPr>
+        <p:txBody>
+          <a:bodyPr/>
+          <a:lstStyle/>
+          <a:p>
+            <a:endParaRPr lang="en-KE" dirty="0"/>
+          </a:p>
+        </p:txBody>
       </p:sp>
       <p:sp>
         <p:nvSpPr>
@@ -2791,7 +2911,7 @@
         </p:nvSpPr>
         <p:spPr>
           <a:xfrm>
-            <a:off x="8549640" y="3474720"/>
+            <a:off x="9260840" y="2788920"/>
             <a:ext cx="2880360" cy="457200"/>
           </a:xfrm>
           <a:prstGeom prst="rect">
@@ -2830,8 +2950,8 @@
         </p:nvSpPr>
         <p:spPr>
           <a:xfrm>
-            <a:off x="8549640" y="3931920"/>
-            <a:ext cx="2880360" cy="914400"/>
+            <a:off x="8549640" y="3852416"/>
+            <a:ext cx="2880360" cy="1620119"/>
           </a:xfrm>
           <a:prstGeom prst="rect">
             <a:avLst/>
@@ -2858,7 +2978,38 @@
                 <a:ea typeface="Montserrat" pitchFamily="34" charset="-122"/>
                 <a:cs typeface="Montserrat" pitchFamily="34" charset="-120"/>
               </a:rPr>
-              <a:t>Daftari ya Deni — profit, loss, and credit, taught through play</a:t>
+              <a:t>Evaluate customer trust, verify repayment dates and issue credit</a:t>
+            </a:r>
+          </a:p>
+          <a:p>
+            <a:pPr marL="0" indent="0">
+              <a:lnSpc>
+                <a:spcPct val="125000"/>
+              </a:lnSpc>
+              <a:buNone/>
+            </a:pPr>
+            <a:endParaRPr lang="en-US" sz="1250" dirty="0">
+              <a:solidFill>
+                <a:srgbClr val="64748B"/>
+              </a:solidFill>
+              <a:latin typeface="Montserrat" pitchFamily="34" charset="0"/>
+            </a:endParaRPr>
+          </a:p>
+          <a:p>
+            <a:pPr marL="0" indent="0">
+              <a:lnSpc>
+                <a:spcPct val="125000"/>
+              </a:lnSpc>
+              <a:buNone/>
+            </a:pPr>
+            <a:r>
+              <a:rPr lang="en-US" sz="1250" dirty="0">
+                <a:solidFill>
+                  <a:srgbClr val="64748B"/>
+                </a:solidFill>
+                <a:latin typeface="Montserrat" pitchFamily="34" charset="0"/>
+              </a:rPr>
+              <a:t>Balances profit, loss, and community accountability</a:t>
             </a:r>
             <a:endParaRPr lang="en-US" sz="1250" dirty="0"/>
           </a:p>
@@ -2872,7 +3023,7 @@
         </p:nvSpPr>
         <p:spPr>
           <a:xfrm>
-            <a:off x="8549640" y="4983480"/>
+            <a:off x="8485632" y="5680166"/>
             <a:ext cx="2880360" cy="0"/>
           </a:xfrm>
           <a:prstGeom prst="line">
@@ -2895,7 +3046,7 @@
         </p:nvSpPr>
         <p:spPr>
           <a:xfrm>
-            <a:off x="8549640" y="5120640"/>
+            <a:off x="8549640" y="5751687"/>
             <a:ext cx="2880360" cy="777240"/>
           </a:xfrm>
           <a:prstGeom prst="rect">
@@ -2965,6 +3116,135 @@
               <a:t>03</a:t>
             </a:r>
             <a:endParaRPr lang="en-US" sz="1000" dirty="0"/>
+          </a:p>
+        </p:txBody>
+      </p:sp>
+      <p:sp>
+        <p:nvSpPr>
+          <p:cNvPr id="28" name="TextBox 27">
+            <a:extLst>
+              <a:ext uri="{FF2B5EF4-FFF2-40B4-BE49-F238E27FC236}">
+                <a16:creationId xmlns:a16="http://schemas.microsoft.com/office/drawing/2014/main" id="{0CA21C83-BBF3-B24C-BEB3-231BF402F223}"/>
+              </a:ext>
+            </a:extLst>
+          </p:cNvPr>
+          <p:cNvSpPr txBox="1"/>
+          <p:nvPr/>
+        </p:nvSpPr>
+        <p:spPr>
+          <a:xfrm>
+            <a:off x="4585715" y="3383280"/>
+            <a:ext cx="2707713" cy="292388"/>
+          </a:xfrm>
+          <a:prstGeom prst="rect">
+            <a:avLst/>
+          </a:prstGeom>
+          <a:noFill/>
+        </p:spPr>
+        <p:txBody>
+          <a:bodyPr wrap="square">
+            <a:spAutoFit/>
+          </a:bodyPr>
+          <a:lstStyle/>
+          <a:p>
+            <a:pPr>
+              <a:defRPr sz="1300" b="1">
+                <a:solidFill>
+                  <a:srgbClr val="0F172A"/>
+                </a:solidFill>
+                <a:latin typeface="Montserrat"/>
+              </a:defRPr>
+            </a:pPr>
+            <a:r>
+              <a:rPr dirty="0"/>
+              <a:t>Applied Mental Arithmetic</a:t>
+            </a:r>
+          </a:p>
+        </p:txBody>
+      </p:sp>
+      <p:sp>
+        <p:nvSpPr>
+          <p:cNvPr id="30" name="TextBox 29">
+            <a:extLst>
+              <a:ext uri="{FF2B5EF4-FFF2-40B4-BE49-F238E27FC236}">
+                <a16:creationId xmlns:a16="http://schemas.microsoft.com/office/drawing/2014/main" id="{45BF5670-C9F0-0E55-BCB5-9739E38DCC44}"/>
+              </a:ext>
+            </a:extLst>
+          </p:cNvPr>
+          <p:cNvSpPr txBox="1"/>
+          <p:nvPr/>
+        </p:nvSpPr>
+        <p:spPr>
+          <a:xfrm>
+            <a:off x="761999" y="3300694"/>
+            <a:ext cx="2699657" cy="292388"/>
+          </a:xfrm>
+          <a:prstGeom prst="rect">
+            <a:avLst/>
+          </a:prstGeom>
+          <a:noFill/>
+        </p:spPr>
+        <p:txBody>
+          <a:bodyPr wrap="square">
+            <a:spAutoFit/>
+          </a:bodyPr>
+          <a:lstStyle/>
+          <a:p>
+            <a:pPr>
+              <a:defRPr sz="1300" b="1">
+                <a:solidFill>
+                  <a:srgbClr val="0F172A"/>
+                </a:solidFill>
+                <a:latin typeface="Montserrat"/>
+              </a:defRPr>
+            </a:pPr>
+            <a:r>
+              <a:rPr dirty="0"/>
+              <a:t>Real-Time NPC Dialogue</a:t>
+            </a:r>
+          </a:p>
+        </p:txBody>
+      </p:sp>
+      <p:sp>
+        <p:nvSpPr>
+          <p:cNvPr id="32" name="TextBox 31">
+            <a:extLst>
+              <a:ext uri="{FF2B5EF4-FFF2-40B4-BE49-F238E27FC236}">
+                <a16:creationId xmlns:a16="http://schemas.microsoft.com/office/drawing/2014/main" id="{74BCD48C-C994-05AD-E8CB-DEE609897AD7}"/>
+              </a:ext>
+            </a:extLst>
+          </p:cNvPr>
+          <p:cNvSpPr txBox="1"/>
+          <p:nvPr/>
+        </p:nvSpPr>
+        <p:spPr>
+          <a:xfrm>
+            <a:off x="8460740" y="3383279"/>
+            <a:ext cx="2969260" cy="292388"/>
+          </a:xfrm>
+          <a:prstGeom prst="rect">
+            <a:avLst/>
+          </a:prstGeom>
+          <a:noFill/>
+        </p:spPr>
+        <p:txBody>
+          <a:bodyPr wrap="square">
+            <a:spAutoFit/>
+          </a:bodyPr>
+          <a:lstStyle/>
+          <a:p>
+            <a:pPr>
+              <a:defRPr sz="1300" b="1">
+                <a:solidFill>
+                  <a:srgbClr val="0F172A"/>
+                </a:solidFill>
+                <a:latin typeface="Montserrat"/>
+              </a:defRPr>
+            </a:pPr>
+            <a:r>
+              <a:rPr dirty="0"/>
+              <a:t>Daftari ya Deni (Credit Ledger)</a:t>
+            </a:r>
           </a:p>
         </p:txBody>
       </p:sp>
